--- a/一首讚美的詩歌.pptx
+++ b/一首讚美的詩歌.pptx
@@ -5,10 +5,13 @@
     <p:sldMasterId id="2147483672" r:id="rId1"/>
   </p:sldMasterIdLst>
   <p:sldIdLst>
-    <p:sldId id="257" r:id="rId2"/>
-    <p:sldId id="259" r:id="rId3"/>
-    <p:sldId id="258" r:id="rId4"/>
-    <p:sldId id="260" r:id="rId5"/>
+    <p:sldId id="353" r:id="rId2"/>
+    <p:sldId id="390" r:id="rId3"/>
+    <p:sldId id="581" r:id="rId4"/>
+    <p:sldId id="582" r:id="rId5"/>
+    <p:sldId id="583" r:id="rId6"/>
+    <p:sldId id="584" r:id="rId7"/>
+    <p:sldId id="585" r:id="rId8"/>
   </p:sldIdLst>
   <p:sldSz cx="9144000" cy="5143500" type="screen16x9"/>
   <p:notesSz cx="6858000" cy="9144000"/>
@@ -164,7 +167,7 @@
           <a:lstStyle/>
           <a:p>
             <a:r>
-              <a:rPr lang="en-US" altLang="zh-TW" smtClean="0"/>
+              <a:rPr lang="en-US" altLang="zh-TW"/>
               <a:t>Click to edit Master title style</a:t>
             </a:r>
             <a:endParaRPr lang="zh-TW" altLang="en-US"/>
@@ -283,7 +286,7 @@
           </a:lstStyle>
           <a:p>
             <a:r>
-              <a:rPr lang="en-US" altLang="zh-TW" smtClean="0"/>
+              <a:rPr lang="en-US" altLang="zh-TW"/>
               <a:t>Click to edit Master subtitle style</a:t>
             </a:r>
             <a:endParaRPr lang="zh-TW" altLang="en-US"/>
@@ -308,7 +311,7 @@
             <a:fld id="{AC437F70-6466-42FF-BF3B-62295FDEB6AD}" type="datetimeFigureOut">
               <a:rPr lang="zh-TW" altLang="en-US" smtClean="0"/>
               <a:pPr/>
-              <a:t>2020/2/8</a:t>
+              <a:t>2024/6/15</a:t>
             </a:fld>
             <a:endParaRPr lang="zh-TW" altLang="en-US"/>
           </a:p>
@@ -398,7 +401,7 @@
           <a:lstStyle/>
           <a:p>
             <a:r>
-              <a:rPr lang="en-US" altLang="zh-TW" smtClean="0"/>
+              <a:rPr lang="en-US" altLang="zh-TW"/>
               <a:t>Click to edit Master title style</a:t>
             </a:r>
             <a:endParaRPr lang="zh-TW" altLang="en-US"/>
@@ -422,35 +425,35 @@
           <a:p>
             <a:pPr lvl="0"/>
             <a:r>
-              <a:rPr lang="en-US" altLang="zh-TW" smtClean="0"/>
+              <a:rPr lang="en-US" altLang="zh-TW"/>
               <a:t>Click to edit Master text styles</a:t>
             </a:r>
           </a:p>
           <a:p>
             <a:pPr lvl="1"/>
             <a:r>
-              <a:rPr lang="en-US" altLang="zh-TW" smtClean="0"/>
+              <a:rPr lang="en-US" altLang="zh-TW"/>
               <a:t>Second level</a:t>
             </a:r>
           </a:p>
           <a:p>
             <a:pPr lvl="2"/>
             <a:r>
-              <a:rPr lang="en-US" altLang="zh-TW" smtClean="0"/>
+              <a:rPr lang="en-US" altLang="zh-TW"/>
               <a:t>Third level</a:t>
             </a:r>
           </a:p>
           <a:p>
             <a:pPr lvl="3"/>
             <a:r>
-              <a:rPr lang="en-US" altLang="zh-TW" smtClean="0"/>
+              <a:rPr lang="en-US" altLang="zh-TW"/>
               <a:t>Fourth level</a:t>
             </a:r>
           </a:p>
           <a:p>
             <a:pPr lvl="4"/>
             <a:r>
-              <a:rPr lang="en-US" altLang="zh-TW" smtClean="0"/>
+              <a:rPr lang="en-US" altLang="zh-TW"/>
               <a:t>Fifth level</a:t>
             </a:r>
             <a:endParaRPr lang="zh-TW" altLang="en-US"/>
@@ -475,7 +478,7 @@
             <a:fld id="{AC437F70-6466-42FF-BF3B-62295FDEB6AD}" type="datetimeFigureOut">
               <a:rPr lang="zh-TW" altLang="en-US" smtClean="0"/>
               <a:pPr/>
-              <a:t>2020/2/8</a:t>
+              <a:t>2024/6/15</a:t>
             </a:fld>
             <a:endParaRPr lang="zh-TW" altLang="en-US"/>
           </a:p>
@@ -570,7 +573,7 @@
           <a:lstStyle/>
           <a:p>
             <a:r>
-              <a:rPr lang="en-US" altLang="zh-TW" smtClean="0"/>
+              <a:rPr lang="en-US" altLang="zh-TW"/>
               <a:t>Click to edit Master title style</a:t>
             </a:r>
             <a:endParaRPr lang="zh-TW" altLang="en-US"/>
@@ -599,35 +602,35 @@
           <a:p>
             <a:pPr lvl="0"/>
             <a:r>
-              <a:rPr lang="en-US" altLang="zh-TW" smtClean="0"/>
+              <a:rPr lang="en-US" altLang="zh-TW"/>
               <a:t>Click to edit Master text styles</a:t>
             </a:r>
           </a:p>
           <a:p>
             <a:pPr lvl="1"/>
             <a:r>
-              <a:rPr lang="en-US" altLang="zh-TW" smtClean="0"/>
+              <a:rPr lang="en-US" altLang="zh-TW"/>
               <a:t>Second level</a:t>
             </a:r>
           </a:p>
           <a:p>
             <a:pPr lvl="2"/>
             <a:r>
-              <a:rPr lang="en-US" altLang="zh-TW" smtClean="0"/>
+              <a:rPr lang="en-US" altLang="zh-TW"/>
               <a:t>Third level</a:t>
             </a:r>
           </a:p>
           <a:p>
             <a:pPr lvl="3"/>
             <a:r>
-              <a:rPr lang="en-US" altLang="zh-TW" smtClean="0"/>
+              <a:rPr lang="en-US" altLang="zh-TW"/>
               <a:t>Fourth level</a:t>
             </a:r>
           </a:p>
           <a:p>
             <a:pPr lvl="4"/>
             <a:r>
-              <a:rPr lang="en-US" altLang="zh-TW" smtClean="0"/>
+              <a:rPr lang="en-US" altLang="zh-TW"/>
               <a:t>Fifth level</a:t>
             </a:r>
             <a:endParaRPr lang="zh-TW" altLang="en-US"/>
@@ -652,7 +655,7 @@
             <a:fld id="{AC437F70-6466-42FF-BF3B-62295FDEB6AD}" type="datetimeFigureOut">
               <a:rPr lang="zh-TW" altLang="en-US" smtClean="0"/>
               <a:pPr/>
-              <a:t>2020/2/8</a:t>
+              <a:t>2024/6/15</a:t>
             </a:fld>
             <a:endParaRPr lang="zh-TW" altLang="en-US"/>
           </a:p>
@@ -742,7 +745,7 @@
           <a:lstStyle/>
           <a:p>
             <a:r>
-              <a:rPr lang="en-US" altLang="zh-TW" smtClean="0"/>
+              <a:rPr lang="en-US" altLang="zh-TW"/>
               <a:t>Click to edit Master title style</a:t>
             </a:r>
             <a:endParaRPr lang="zh-TW" altLang="en-US"/>
@@ -766,35 +769,35 @@
           <a:p>
             <a:pPr lvl="0"/>
             <a:r>
-              <a:rPr lang="en-US" altLang="zh-TW" smtClean="0"/>
+              <a:rPr lang="en-US" altLang="zh-TW"/>
               <a:t>Click to edit Master text styles</a:t>
             </a:r>
           </a:p>
           <a:p>
             <a:pPr lvl="1"/>
             <a:r>
-              <a:rPr lang="en-US" altLang="zh-TW" smtClean="0"/>
+              <a:rPr lang="en-US" altLang="zh-TW"/>
               <a:t>Second level</a:t>
             </a:r>
           </a:p>
           <a:p>
             <a:pPr lvl="2"/>
             <a:r>
-              <a:rPr lang="en-US" altLang="zh-TW" smtClean="0"/>
+              <a:rPr lang="en-US" altLang="zh-TW"/>
               <a:t>Third level</a:t>
             </a:r>
           </a:p>
           <a:p>
             <a:pPr lvl="3"/>
             <a:r>
-              <a:rPr lang="en-US" altLang="zh-TW" smtClean="0"/>
+              <a:rPr lang="en-US" altLang="zh-TW"/>
               <a:t>Fourth level</a:t>
             </a:r>
           </a:p>
           <a:p>
             <a:pPr lvl="4"/>
             <a:r>
-              <a:rPr lang="en-US" altLang="zh-TW" smtClean="0"/>
+              <a:rPr lang="en-US" altLang="zh-TW"/>
               <a:t>Fifth level</a:t>
             </a:r>
             <a:endParaRPr lang="zh-TW" altLang="en-US"/>
@@ -819,7 +822,7 @@
             <a:fld id="{AC437F70-6466-42FF-BF3B-62295FDEB6AD}" type="datetimeFigureOut">
               <a:rPr lang="zh-TW" altLang="en-US" smtClean="0"/>
               <a:pPr/>
-              <a:t>2020/2/8</a:t>
+              <a:t>2024/6/15</a:t>
             </a:fld>
             <a:endParaRPr lang="zh-TW" altLang="en-US"/>
           </a:p>
@@ -918,7 +921,7 @@
           </a:lstStyle>
           <a:p>
             <a:r>
-              <a:rPr lang="en-US" altLang="zh-TW" smtClean="0"/>
+              <a:rPr lang="en-US" altLang="zh-TW"/>
               <a:t>Click to edit Master title style</a:t>
             </a:r>
             <a:endParaRPr lang="zh-TW" altLang="en-US"/>
@@ -1038,7 +1041,7 @@
           <a:p>
             <a:pPr lvl="0"/>
             <a:r>
-              <a:rPr lang="en-US" altLang="zh-TW" smtClean="0"/>
+              <a:rPr lang="en-US" altLang="zh-TW"/>
               <a:t>Click to edit Master text styles</a:t>
             </a:r>
           </a:p>
@@ -1062,7 +1065,7 @@
             <a:fld id="{AC437F70-6466-42FF-BF3B-62295FDEB6AD}" type="datetimeFigureOut">
               <a:rPr lang="zh-TW" altLang="en-US" smtClean="0"/>
               <a:pPr/>
-              <a:t>2020/2/8</a:t>
+              <a:t>2024/6/15</a:t>
             </a:fld>
             <a:endParaRPr lang="zh-TW" altLang="en-US"/>
           </a:p>
@@ -1152,7 +1155,7 @@
           <a:lstStyle/>
           <a:p>
             <a:r>
-              <a:rPr lang="en-US" altLang="zh-TW" smtClean="0"/>
+              <a:rPr lang="en-US" altLang="zh-TW"/>
               <a:t>Click to edit Master title style</a:t>
             </a:r>
             <a:endParaRPr lang="zh-TW" altLang="en-US"/>
@@ -1209,35 +1212,35 @@
           <a:p>
             <a:pPr lvl="0"/>
             <a:r>
-              <a:rPr lang="en-US" altLang="zh-TW" smtClean="0"/>
+              <a:rPr lang="en-US" altLang="zh-TW"/>
               <a:t>Click to edit Master text styles</a:t>
             </a:r>
           </a:p>
           <a:p>
             <a:pPr lvl="1"/>
             <a:r>
-              <a:rPr lang="en-US" altLang="zh-TW" smtClean="0"/>
+              <a:rPr lang="en-US" altLang="zh-TW"/>
               <a:t>Second level</a:t>
             </a:r>
           </a:p>
           <a:p>
             <a:pPr lvl="2"/>
             <a:r>
-              <a:rPr lang="en-US" altLang="zh-TW" smtClean="0"/>
+              <a:rPr lang="en-US" altLang="zh-TW"/>
               <a:t>Third level</a:t>
             </a:r>
           </a:p>
           <a:p>
             <a:pPr lvl="3"/>
             <a:r>
-              <a:rPr lang="en-US" altLang="zh-TW" smtClean="0"/>
+              <a:rPr lang="en-US" altLang="zh-TW"/>
               <a:t>Fourth level</a:t>
             </a:r>
           </a:p>
           <a:p>
             <a:pPr lvl="4"/>
             <a:r>
-              <a:rPr lang="en-US" altLang="zh-TW" smtClean="0"/>
+              <a:rPr lang="en-US" altLang="zh-TW"/>
               <a:t>Fifth level</a:t>
             </a:r>
             <a:endParaRPr lang="zh-TW" altLang="en-US"/>
@@ -1294,35 +1297,35 @@
           <a:p>
             <a:pPr lvl="0"/>
             <a:r>
-              <a:rPr lang="en-US" altLang="zh-TW" smtClean="0"/>
+              <a:rPr lang="en-US" altLang="zh-TW"/>
               <a:t>Click to edit Master text styles</a:t>
             </a:r>
           </a:p>
           <a:p>
             <a:pPr lvl="1"/>
             <a:r>
-              <a:rPr lang="en-US" altLang="zh-TW" smtClean="0"/>
+              <a:rPr lang="en-US" altLang="zh-TW"/>
               <a:t>Second level</a:t>
             </a:r>
           </a:p>
           <a:p>
             <a:pPr lvl="2"/>
             <a:r>
-              <a:rPr lang="en-US" altLang="zh-TW" smtClean="0"/>
+              <a:rPr lang="en-US" altLang="zh-TW"/>
               <a:t>Third level</a:t>
             </a:r>
           </a:p>
           <a:p>
             <a:pPr lvl="3"/>
             <a:r>
-              <a:rPr lang="en-US" altLang="zh-TW" smtClean="0"/>
+              <a:rPr lang="en-US" altLang="zh-TW"/>
               <a:t>Fourth level</a:t>
             </a:r>
           </a:p>
           <a:p>
             <a:pPr lvl="4"/>
             <a:r>
-              <a:rPr lang="en-US" altLang="zh-TW" smtClean="0"/>
+              <a:rPr lang="en-US" altLang="zh-TW"/>
               <a:t>Fifth level</a:t>
             </a:r>
             <a:endParaRPr lang="zh-TW" altLang="en-US"/>
@@ -1347,7 +1350,7 @@
             <a:fld id="{AC437F70-6466-42FF-BF3B-62295FDEB6AD}" type="datetimeFigureOut">
               <a:rPr lang="zh-TW" altLang="en-US" smtClean="0"/>
               <a:pPr/>
-              <a:t>2020/2/8</a:t>
+              <a:t>2024/6/15</a:t>
             </a:fld>
             <a:endParaRPr lang="zh-TW" altLang="en-US"/>
           </a:p>
@@ -1441,7 +1444,7 @@
           </a:lstStyle>
           <a:p>
             <a:r>
-              <a:rPr lang="en-US" altLang="zh-TW" smtClean="0"/>
+              <a:rPr lang="en-US" altLang="zh-TW"/>
               <a:t>Click to edit Master title style</a:t>
             </a:r>
             <a:endParaRPr lang="zh-TW" altLang="en-US"/>
@@ -1507,7 +1510,7 @@
           <a:p>
             <a:pPr lvl="0"/>
             <a:r>
-              <a:rPr lang="en-US" altLang="zh-TW" smtClean="0"/>
+              <a:rPr lang="en-US" altLang="zh-TW"/>
               <a:t>Click to edit Master text styles</a:t>
             </a:r>
           </a:p>
@@ -1563,35 +1566,35 @@
           <a:p>
             <a:pPr lvl="0"/>
             <a:r>
-              <a:rPr lang="en-US" altLang="zh-TW" smtClean="0"/>
+              <a:rPr lang="en-US" altLang="zh-TW"/>
               <a:t>Click to edit Master text styles</a:t>
             </a:r>
           </a:p>
           <a:p>
             <a:pPr lvl="1"/>
             <a:r>
-              <a:rPr lang="en-US" altLang="zh-TW" smtClean="0"/>
+              <a:rPr lang="en-US" altLang="zh-TW"/>
               <a:t>Second level</a:t>
             </a:r>
           </a:p>
           <a:p>
             <a:pPr lvl="2"/>
             <a:r>
-              <a:rPr lang="en-US" altLang="zh-TW" smtClean="0"/>
+              <a:rPr lang="en-US" altLang="zh-TW"/>
               <a:t>Third level</a:t>
             </a:r>
           </a:p>
           <a:p>
             <a:pPr lvl="3"/>
             <a:r>
-              <a:rPr lang="en-US" altLang="zh-TW" smtClean="0"/>
+              <a:rPr lang="en-US" altLang="zh-TW"/>
               <a:t>Fourth level</a:t>
             </a:r>
           </a:p>
           <a:p>
             <a:pPr lvl="4"/>
             <a:r>
-              <a:rPr lang="en-US" altLang="zh-TW" smtClean="0"/>
+              <a:rPr lang="en-US" altLang="zh-TW"/>
               <a:t>Fifth level</a:t>
             </a:r>
             <a:endParaRPr lang="zh-TW" altLang="en-US"/>
@@ -1657,7 +1660,7 @@
           <a:p>
             <a:pPr lvl="0"/>
             <a:r>
-              <a:rPr lang="en-US" altLang="zh-TW" smtClean="0"/>
+              <a:rPr lang="en-US" altLang="zh-TW"/>
               <a:t>Click to edit Master text styles</a:t>
             </a:r>
           </a:p>
@@ -1713,35 +1716,35 @@
           <a:p>
             <a:pPr lvl="0"/>
             <a:r>
-              <a:rPr lang="en-US" altLang="zh-TW" smtClean="0"/>
+              <a:rPr lang="en-US" altLang="zh-TW"/>
               <a:t>Click to edit Master text styles</a:t>
             </a:r>
           </a:p>
           <a:p>
             <a:pPr lvl="1"/>
             <a:r>
-              <a:rPr lang="en-US" altLang="zh-TW" smtClean="0"/>
+              <a:rPr lang="en-US" altLang="zh-TW"/>
               <a:t>Second level</a:t>
             </a:r>
           </a:p>
           <a:p>
             <a:pPr lvl="2"/>
             <a:r>
-              <a:rPr lang="en-US" altLang="zh-TW" smtClean="0"/>
+              <a:rPr lang="en-US" altLang="zh-TW"/>
               <a:t>Third level</a:t>
             </a:r>
           </a:p>
           <a:p>
             <a:pPr lvl="3"/>
             <a:r>
-              <a:rPr lang="en-US" altLang="zh-TW" smtClean="0"/>
+              <a:rPr lang="en-US" altLang="zh-TW"/>
               <a:t>Fourth level</a:t>
             </a:r>
           </a:p>
           <a:p>
             <a:pPr lvl="4"/>
             <a:r>
-              <a:rPr lang="en-US" altLang="zh-TW" smtClean="0"/>
+              <a:rPr lang="en-US" altLang="zh-TW"/>
               <a:t>Fifth level</a:t>
             </a:r>
             <a:endParaRPr lang="zh-TW" altLang="en-US"/>
@@ -1766,7 +1769,7 @@
             <a:fld id="{AC437F70-6466-42FF-BF3B-62295FDEB6AD}" type="datetimeFigureOut">
               <a:rPr lang="zh-TW" altLang="en-US" smtClean="0"/>
               <a:pPr/>
-              <a:t>2020/2/8</a:t>
+              <a:t>2024/6/15</a:t>
             </a:fld>
             <a:endParaRPr lang="zh-TW" altLang="en-US"/>
           </a:p>
@@ -1856,7 +1859,7 @@
           <a:lstStyle/>
           <a:p>
             <a:r>
-              <a:rPr lang="en-US" altLang="zh-TW" smtClean="0"/>
+              <a:rPr lang="en-US" altLang="zh-TW"/>
               <a:t>Click to edit Master title style</a:t>
             </a:r>
             <a:endParaRPr lang="zh-TW" altLang="en-US"/>
@@ -1881,7 +1884,7 @@
             <a:fld id="{AC437F70-6466-42FF-BF3B-62295FDEB6AD}" type="datetimeFigureOut">
               <a:rPr lang="zh-TW" altLang="en-US" smtClean="0"/>
               <a:pPr/>
-              <a:t>2020/2/8</a:t>
+              <a:t>2024/6/15</a:t>
             </a:fld>
             <a:endParaRPr lang="zh-TW" altLang="en-US"/>
           </a:p>
@@ -1973,7 +1976,7 @@
             <a:fld id="{AC437F70-6466-42FF-BF3B-62295FDEB6AD}" type="datetimeFigureOut">
               <a:rPr lang="zh-TW" altLang="en-US" smtClean="0"/>
               <a:pPr/>
-              <a:t>2020/2/8</a:t>
+              <a:t>2024/6/15</a:t>
             </a:fld>
             <a:endParaRPr lang="zh-TW" altLang="en-US"/>
           </a:p>
@@ -2072,7 +2075,7 @@
           </a:lstStyle>
           <a:p>
             <a:r>
-              <a:rPr lang="en-US" altLang="zh-TW" smtClean="0"/>
+              <a:rPr lang="en-US" altLang="zh-TW"/>
               <a:t>Click to edit Master title style</a:t>
             </a:r>
             <a:endParaRPr lang="zh-TW" altLang="en-US"/>
@@ -2129,35 +2132,35 @@
           <a:p>
             <a:pPr lvl="0"/>
             <a:r>
-              <a:rPr lang="en-US" altLang="zh-TW" smtClean="0"/>
+              <a:rPr lang="en-US" altLang="zh-TW"/>
               <a:t>Click to edit Master text styles</a:t>
             </a:r>
           </a:p>
           <a:p>
             <a:pPr lvl="1"/>
             <a:r>
-              <a:rPr lang="en-US" altLang="zh-TW" smtClean="0"/>
+              <a:rPr lang="en-US" altLang="zh-TW"/>
               <a:t>Second level</a:t>
             </a:r>
           </a:p>
           <a:p>
             <a:pPr lvl="2"/>
             <a:r>
-              <a:rPr lang="en-US" altLang="zh-TW" smtClean="0"/>
+              <a:rPr lang="en-US" altLang="zh-TW"/>
               <a:t>Third level</a:t>
             </a:r>
           </a:p>
           <a:p>
             <a:pPr lvl="3"/>
             <a:r>
-              <a:rPr lang="en-US" altLang="zh-TW" smtClean="0"/>
+              <a:rPr lang="en-US" altLang="zh-TW"/>
               <a:t>Fourth level</a:t>
             </a:r>
           </a:p>
           <a:p>
             <a:pPr lvl="4"/>
             <a:r>
-              <a:rPr lang="en-US" altLang="zh-TW" smtClean="0"/>
+              <a:rPr lang="en-US" altLang="zh-TW"/>
               <a:t>Fifth level</a:t>
             </a:r>
             <a:endParaRPr lang="zh-TW" altLang="en-US"/>
@@ -2223,7 +2226,7 @@
           <a:p>
             <a:pPr lvl="0"/>
             <a:r>
-              <a:rPr lang="en-US" altLang="zh-TW" smtClean="0"/>
+              <a:rPr lang="en-US" altLang="zh-TW"/>
               <a:t>Click to edit Master text styles</a:t>
             </a:r>
           </a:p>
@@ -2247,7 +2250,7 @@
             <a:fld id="{AC437F70-6466-42FF-BF3B-62295FDEB6AD}" type="datetimeFigureOut">
               <a:rPr lang="zh-TW" altLang="en-US" smtClean="0"/>
               <a:pPr/>
-              <a:t>2020/2/8</a:t>
+              <a:t>2024/6/15</a:t>
             </a:fld>
             <a:endParaRPr lang="zh-TW" altLang="en-US"/>
           </a:p>
@@ -2346,7 +2349,7 @@
           </a:lstStyle>
           <a:p>
             <a:r>
-              <a:rPr lang="en-US" altLang="zh-TW" smtClean="0"/>
+              <a:rPr lang="en-US" altLang="zh-TW"/>
               <a:t>Click to edit Master title style</a:t>
             </a:r>
             <a:endParaRPr lang="zh-TW" altLang="en-US"/>
@@ -2411,7 +2414,7 @@
           </a:lstStyle>
           <a:p>
             <a:r>
-              <a:rPr lang="en-US" altLang="zh-TW" smtClean="0"/>
+              <a:rPr lang="en-US" altLang="zh-TW"/>
               <a:t>Click icon to add picture</a:t>
             </a:r>
             <a:endParaRPr lang="zh-TW" altLang="en-US"/>
@@ -2477,7 +2480,7 @@
           <a:p>
             <a:pPr lvl="0"/>
             <a:r>
-              <a:rPr lang="en-US" altLang="zh-TW" smtClean="0"/>
+              <a:rPr lang="en-US" altLang="zh-TW"/>
               <a:t>Click to edit Master text styles</a:t>
             </a:r>
           </a:p>
@@ -2501,7 +2504,7 @@
             <a:fld id="{AC437F70-6466-42FF-BF3B-62295FDEB6AD}" type="datetimeFigureOut">
               <a:rPr lang="zh-TW" altLang="en-US" smtClean="0"/>
               <a:pPr/>
-              <a:t>2020/2/8</a:t>
+              <a:t>2024/6/15</a:t>
             </a:fld>
             <a:endParaRPr lang="zh-TW" altLang="en-US"/>
           </a:p>
@@ -2611,10 +2614,9 @@
           <a:lstStyle/>
           <a:p>
             <a:r>
-              <a:rPr lang="zh-TW" altLang="en-US" smtClean="0"/>
+              <a:rPr lang="zh-TW" altLang="en-US"/>
               <a:t>按一下以編輯母片標題樣式</a:t>
             </a:r>
-            <a:endParaRPr lang="zh-TW" altLang="en-US"/>
           </a:p>
         </p:txBody>
       </p:sp>
@@ -2645,38 +2647,37 @@
           <a:p>
             <a:pPr lvl="0"/>
             <a:r>
-              <a:rPr lang="zh-TW" altLang="en-US" smtClean="0"/>
+              <a:rPr lang="zh-TW" altLang="en-US"/>
               <a:t>按一下以編輯母片文字樣式</a:t>
             </a:r>
           </a:p>
           <a:p>
             <a:pPr lvl="1"/>
             <a:r>
-              <a:rPr lang="zh-TW" altLang="en-US" smtClean="0"/>
+              <a:rPr lang="zh-TW" altLang="en-US"/>
               <a:t>第二層</a:t>
             </a:r>
           </a:p>
           <a:p>
             <a:pPr lvl="2"/>
             <a:r>
-              <a:rPr lang="zh-TW" altLang="en-US" smtClean="0"/>
+              <a:rPr lang="zh-TW" altLang="en-US"/>
               <a:t>第三層</a:t>
             </a:r>
           </a:p>
           <a:p>
             <a:pPr lvl="3"/>
             <a:r>
-              <a:rPr lang="zh-TW" altLang="en-US" smtClean="0"/>
+              <a:rPr lang="zh-TW" altLang="en-US"/>
               <a:t>第四層</a:t>
             </a:r>
           </a:p>
           <a:p>
             <a:pPr lvl="4"/>
             <a:r>
-              <a:rPr lang="zh-TW" altLang="en-US" smtClean="0"/>
+              <a:rPr lang="zh-TW" altLang="en-US"/>
               <a:t>第五層</a:t>
             </a:r>
-            <a:endParaRPr lang="zh-TW" altLang="en-US"/>
           </a:p>
         </p:txBody>
       </p:sp>
@@ -2716,7 +2717,7 @@
             <a:fld id="{AC437F70-6466-42FF-BF3B-62295FDEB6AD}" type="datetimeFigureOut">
               <a:rPr lang="zh-TW" altLang="en-US" smtClean="0"/>
               <a:pPr/>
-              <a:t>2020/2/8</a:t>
+              <a:t>2024/6/15</a:t>
             </a:fld>
             <a:endParaRPr lang="zh-TW" altLang="en-US"/>
           </a:p>
@@ -3089,49 +3090,18 @@
       </p:grpSpPr>
       <p:sp>
         <p:nvSpPr>
-          <p:cNvPr id="2" name="標題 1"/>
+          <p:cNvPr id="4" name="標題 3"/>
           <p:cNvSpPr>
             <a:spLocks noGrp="1"/>
           </p:cNvSpPr>
           <p:nvPr>
             <p:ph type="title"/>
-          </p:nvPr>
-        </p:nvSpPr>
-        <p:spPr/>
-        <p:txBody>
-          <a:bodyPr>
-            <a:normAutofit/>
-          </a:bodyPr>
-          <a:lstStyle/>
-          <a:p>
-            <a:r>
-              <a:rPr lang="zh-CN" altLang="en-US" sz="4000" b="1" dirty="0" smtClean="0">
-                <a:latin typeface="Microsoft JhengHei" pitchFamily="34" charset="-120"/>
-                <a:ea typeface="Microsoft JhengHei" pitchFamily="34" charset="-120"/>
-              </a:rPr>
-              <a:t>一首讚美的詩歌</a:t>
-            </a:r>
-            <a:endParaRPr lang="zh-TW" altLang="en-US" sz="4000" b="1" dirty="0">
-              <a:latin typeface="Microsoft JhengHei" pitchFamily="34" charset="-120"/>
-              <a:ea typeface="Microsoft JhengHei" pitchFamily="34" charset="-120"/>
-            </a:endParaRPr>
-          </a:p>
-        </p:txBody>
-      </p:sp>
-      <p:sp>
-        <p:nvSpPr>
-          <p:cNvPr id="3" name="內容版面配置區 2"/>
-          <p:cNvSpPr>
-            <a:spLocks noGrp="1"/>
-          </p:cNvSpPr>
-          <p:nvPr>
-            <p:ph idx="1"/>
           </p:nvPr>
         </p:nvSpPr>
         <p:spPr>
           <a:xfrm>
-            <a:off x="0" y="1200151"/>
-            <a:ext cx="9144000" cy="3394472"/>
+            <a:off x="0" y="1995686"/>
+            <a:ext cx="9144000" cy="857250"/>
           </a:xfrm>
         </p:spPr>
         <p:txBody>
@@ -3140,51 +3110,36 @@
           </a:bodyPr>
           <a:lstStyle/>
           <a:p>
-            <a:pPr algn="ctr">
-              <a:buNone/>
-            </a:pPr>
-            <a:r>
-              <a:rPr lang="zh-TW" altLang="en-US" sz="4800" b="1" dirty="0" smtClean="0">
-                <a:latin typeface="Microsoft JhengHei" pitchFamily="34" charset="-120"/>
-                <a:ea typeface="Microsoft JhengHei" pitchFamily="34" charset="-120"/>
+            <a:r>
+              <a:rPr lang="zh-CN" altLang="en-US" sz="5400" b="1" i="1" dirty="0">
+                <a:solidFill>
+                  <a:srgbClr val="000066"/>
+                </a:solidFill>
+                <a:effectLst>
+                  <a:outerShdw blurRad="38100" dist="38100" dir="2700000" algn="tl">
+                    <a:srgbClr val="000000">
+                      <a:alpha val="43137"/>
+                    </a:srgbClr>
+                  </a:outerShdw>
+                </a:effectLst>
+                <a:latin typeface="微軟正黑體" pitchFamily="34" charset="-120"/>
+                <a:ea typeface="微軟正黑體" pitchFamily="34" charset="-120"/>
               </a:rPr>
-              <a:t>讓那讚美的聲音</a:t>
-            </a:r>
-            <a:endParaRPr lang="en-US" altLang="zh-TW" sz="4800" b="1" dirty="0" smtClean="0">
-              <a:latin typeface="Microsoft JhengHei" pitchFamily="34" charset="-120"/>
-              <a:ea typeface="Microsoft JhengHei" pitchFamily="34" charset="-120"/>
-            </a:endParaRPr>
-          </a:p>
-          <a:p>
-            <a:pPr algn="ctr">
-              <a:buNone/>
-            </a:pPr>
-            <a:r>
-              <a:rPr lang="zh-TW" altLang="en-US" sz="4800" b="1" dirty="0" smtClean="0">
-                <a:latin typeface="Microsoft JhengHei" pitchFamily="34" charset="-120"/>
-                <a:ea typeface="Microsoft JhengHei" pitchFamily="34" charset="-120"/>
-              </a:rPr>
-              <a:t>在這空間響遍</a:t>
-            </a:r>
-            <a:endParaRPr lang="en-US" altLang="zh-TW" sz="4800" b="1" dirty="0">
-              <a:latin typeface="Microsoft JhengHei" pitchFamily="34" charset="-120"/>
-              <a:ea typeface="Microsoft JhengHei" pitchFamily="34" charset="-120"/>
-            </a:endParaRPr>
-          </a:p>
-          <a:p>
-            <a:pPr algn="ctr">
-              <a:buNone/>
-            </a:pPr>
-            <a:r>
-              <a:rPr lang="zh-TW" altLang="en-US" sz="4800" b="1" dirty="0" smtClean="0">
-                <a:latin typeface="Microsoft JhengHei" pitchFamily="34" charset="-120"/>
-                <a:ea typeface="Microsoft JhengHei" pitchFamily="34" charset="-120"/>
-              </a:rPr>
-              <a:t>讓那敬拜的心聲  永不休止</a:t>
-            </a:r>
-            <a:endParaRPr lang="en-US" altLang="zh-TW" sz="4800" b="1" dirty="0">
-              <a:latin typeface="Microsoft JhengHei" pitchFamily="34" charset="-120"/>
-              <a:ea typeface="Microsoft JhengHei" pitchFamily="34" charset="-120"/>
+              <a:t>一首讚美的詩歌</a:t>
+            </a:r>
+            <a:endParaRPr lang="zh-TW" altLang="en-US" sz="5400" b="1" i="1" dirty="0">
+              <a:solidFill>
+                <a:srgbClr val="000066"/>
+              </a:solidFill>
+              <a:effectLst>
+                <a:outerShdw blurRad="38100" dist="38100" dir="2700000" algn="tl">
+                  <a:srgbClr val="000000">
+                    <a:alpha val="43137"/>
+                  </a:srgbClr>
+                </a:outerShdw>
+              </a:effectLst>
+              <a:latin typeface="微軟正黑體" pitchFamily="34" charset="-120"/>
+              <a:ea typeface="微軟正黑體" pitchFamily="34" charset="-120"/>
             </a:endParaRPr>
           </a:p>
         </p:txBody>
@@ -3194,13 +3149,6 @@
   <p:clrMapOvr>
     <a:masterClrMapping/>
   </p:clrMapOvr>
-  <p:timing>
-    <p:tnLst>
-      <p:par>
-        <p:cTn id="1" dur="indefinite" restart="never" nodeType="tmRoot"/>
-      </p:par>
-    </p:tnLst>
-  </p:timing>
 </p:sld>
 </file>
 
@@ -3223,99 +3171,150 @@
       </p:grpSpPr>
       <p:sp>
         <p:nvSpPr>
-          <p:cNvPr id="2" name="標題 1"/>
-          <p:cNvSpPr>
-            <a:spLocks noGrp="1"/>
-          </p:cNvSpPr>
-          <p:nvPr>
-            <p:ph type="title"/>
-          </p:nvPr>
-        </p:nvSpPr>
-        <p:spPr/>
-        <p:txBody>
-          <a:bodyPr>
+          <p:cNvPr id="5" name="內容版面配置區 4"/>
+          <p:cNvSpPr>
+            <a:spLocks noGrp="1"/>
+          </p:cNvSpPr>
+          <p:nvPr>
+            <p:ph idx="1"/>
+          </p:nvPr>
+        </p:nvSpPr>
+        <p:spPr>
+          <a:xfrm>
+            <a:off x="0" y="1563638"/>
+            <a:ext cx="9144000" cy="1803647"/>
+          </a:xfrm>
+        </p:spPr>
+        <p:txBody>
+          <a:bodyPr anchor="ctr">
             <a:normAutofit/>
           </a:bodyPr>
           <a:lstStyle/>
           <a:p>
-            <a:r>
-              <a:rPr lang="zh-CN" altLang="en-US" sz="4000" b="1" dirty="0">
-                <a:latin typeface="Microsoft JhengHei" pitchFamily="34" charset="-120"/>
-                <a:ea typeface="Microsoft JhengHei" pitchFamily="34" charset="-120"/>
+            <a:pPr algn="ctr">
+              <a:buNone/>
+            </a:pPr>
+            <a:r>
+              <a:rPr lang="zh-TW" altLang="en-US" sz="4800" b="1" dirty="0">
+                <a:solidFill>
+                  <a:srgbClr val="000066"/>
+                </a:solidFill>
+                <a:latin typeface="微軟正黑體" pitchFamily="34" charset="-120"/>
+                <a:ea typeface="微軟正黑體" pitchFamily="34" charset="-120"/>
               </a:rPr>
-              <a:t>一首讚美的詩歌</a:t>
-            </a:r>
-            <a:endParaRPr lang="zh-TW" altLang="en-US" sz="4000" b="1" dirty="0">
-              <a:latin typeface="Microsoft JhengHei" pitchFamily="34" charset="-120"/>
-              <a:ea typeface="Microsoft JhengHei" pitchFamily="34" charset="-120"/>
+              <a:t>讓那讚美的聲音</a:t>
+            </a:r>
+            <a:r>
+              <a:rPr lang="en-US" altLang="zh-TW" sz="4800" b="1" dirty="0">
+                <a:solidFill>
+                  <a:srgbClr val="000066"/>
+                </a:solidFill>
+                <a:latin typeface="微軟正黑體" pitchFamily="34" charset="-120"/>
+                <a:ea typeface="微軟正黑體" pitchFamily="34" charset="-120"/>
+              </a:rPr>
+              <a:t>  </a:t>
+            </a:r>
+            <a:r>
+              <a:rPr lang="zh-TW" altLang="en-US" sz="4800" b="1" dirty="0">
+                <a:solidFill>
+                  <a:srgbClr val="000066"/>
+                </a:solidFill>
+                <a:latin typeface="微軟正黑體" pitchFamily="34" charset="-120"/>
+                <a:ea typeface="微軟正黑體" pitchFamily="34" charset="-120"/>
+              </a:rPr>
+              <a:t>在這空間響遍</a:t>
+            </a:r>
+            <a:endParaRPr lang="en-US" altLang="zh-TW" sz="4800" b="1" dirty="0">
+              <a:solidFill>
+                <a:srgbClr val="000066"/>
+              </a:solidFill>
+              <a:latin typeface="微軟正黑體" pitchFamily="34" charset="-120"/>
+              <a:ea typeface="微軟正黑體" pitchFamily="34" charset="-120"/>
             </a:endParaRPr>
           </a:p>
-        </p:txBody>
-      </p:sp>
-      <p:sp>
-        <p:nvSpPr>
-          <p:cNvPr id="3" name="內容版面配置區 2"/>
-          <p:cNvSpPr>
-            <a:spLocks noGrp="1"/>
-          </p:cNvSpPr>
-          <p:nvPr>
-            <p:ph idx="1"/>
-          </p:nvPr>
+          <a:p>
+            <a:pPr algn="ctr">
+              <a:buNone/>
+            </a:pPr>
+            <a:r>
+              <a:rPr lang="zh-TW" altLang="en-US" sz="4800" b="1" dirty="0">
+                <a:solidFill>
+                  <a:srgbClr val="000066"/>
+                </a:solidFill>
+                <a:latin typeface="微軟正黑體" pitchFamily="34" charset="-120"/>
+                <a:ea typeface="微軟正黑體" pitchFamily="34" charset="-120"/>
+              </a:rPr>
+              <a:t>讓那敬拜的心聲  永不休止</a:t>
+            </a:r>
+            <a:endParaRPr lang="en-US" altLang="zh-TW" sz="4800" b="1" dirty="0">
+              <a:solidFill>
+                <a:srgbClr val="000066"/>
+              </a:solidFill>
+              <a:latin typeface="微軟正黑體" pitchFamily="34" charset="-120"/>
+              <a:ea typeface="微軟正黑體" pitchFamily="34" charset="-120"/>
+            </a:endParaRPr>
+          </a:p>
+        </p:txBody>
+      </p:sp>
+      <p:sp>
+        <p:nvSpPr>
+          <p:cNvPr id="3" name="TextBox 2"/>
+          <p:cNvSpPr txBox="1"/>
+          <p:nvPr/>
         </p:nvSpPr>
         <p:spPr>
           <a:xfrm>
-            <a:off x="0" y="1200151"/>
-            <a:ext cx="9144000" cy="3394472"/>
+            <a:off x="0" y="3867894"/>
+            <a:ext cx="9144000" cy="461665"/>
           </a:xfrm>
+          <a:prstGeom prst="rect">
+            <a:avLst/>
+          </a:prstGeom>
+          <a:noFill/>
         </p:spPr>
         <p:txBody>
-          <a:bodyPr>
-            <a:noAutofit/>
+          <a:bodyPr wrap="square" rtlCol="0">
+            <a:spAutoFit/>
           </a:bodyPr>
           <a:lstStyle/>
           <a:p>
-            <a:pPr algn="ctr">
-              <a:buNone/>
-            </a:pPr>
-            <a:r>
-              <a:rPr lang="zh-TW" altLang="en-US" sz="4800" b="1" dirty="0">
-                <a:latin typeface="Microsoft JhengHei" pitchFamily="34" charset="-120"/>
-                <a:ea typeface="Microsoft JhengHei" pitchFamily="34" charset="-120"/>
+            <a:pPr algn="ctr"/>
+            <a:r>
+              <a:rPr lang="en-US" sz="2400" b="1" dirty="0">
+                <a:solidFill>
+                  <a:srgbClr val="000066"/>
+                </a:solidFill>
+                <a:latin typeface="Microsoft JhengHei" panose="020B0604030504040204" pitchFamily="34" charset="-120"/>
+                <a:ea typeface="Microsoft JhengHei" panose="020B0604030504040204" pitchFamily="34" charset="-120"/>
               </a:rPr>
-              <a:t>讓我心中所有意念</a:t>
-            </a:r>
-            <a:endParaRPr lang="en-US" altLang="zh-TW" sz="4800" b="1" dirty="0">
-              <a:latin typeface="Microsoft JhengHei" pitchFamily="34" charset="-120"/>
-              <a:ea typeface="Microsoft JhengHei" pitchFamily="34" charset="-120"/>
+              <a:t>( </a:t>
+            </a:r>
+            <a:r>
+              <a:rPr lang="zh-CN" altLang="en-US" sz="2400" b="1" dirty="0">
+                <a:solidFill>
+                  <a:srgbClr val="000066"/>
+                </a:solidFill>
+                <a:latin typeface="Microsoft JhengHei" panose="020B0604030504040204" pitchFamily="34" charset="-120"/>
+                <a:ea typeface="Microsoft JhengHei" panose="020B0604030504040204" pitchFamily="34" charset="-120"/>
+              </a:rPr>
+              <a:t>正歌</a:t>
+            </a:r>
+            <a:r>
+              <a:rPr lang="en-US" sz="2400" b="1" dirty="0">
+                <a:solidFill>
+                  <a:srgbClr val="000066"/>
+                </a:solidFill>
+                <a:latin typeface="Microsoft JhengHei" panose="020B0604030504040204" pitchFamily="34" charset="-120"/>
+                <a:ea typeface="Microsoft JhengHei" panose="020B0604030504040204" pitchFamily="34" charset="-120"/>
+              </a:rPr>
+              <a:t> )</a:t>
+            </a:r>
+            <a:endParaRPr lang="vi-VN" sz="2400" b="1" dirty="0">
+              <a:solidFill>
+                <a:srgbClr val="000066"/>
+              </a:solidFill>
+              <a:ea typeface="Microsoft JhengHei" panose="020B0604030504040204" pitchFamily="34" charset="-120"/>
             </a:endParaRPr>
-          </a:p>
-          <a:p>
-            <a:pPr algn="ctr">
-              <a:buNone/>
-            </a:pPr>
-            <a:r>
-              <a:rPr lang="zh-TW" altLang="en-US" sz="4800" b="1" dirty="0">
-                <a:latin typeface="Microsoft JhengHei" pitchFamily="34" charset="-120"/>
-                <a:ea typeface="Microsoft JhengHei" pitchFamily="34" charset="-120"/>
-              </a:rPr>
-              <a:t>此刻都交主的手裡</a:t>
-            </a:r>
-            <a:endParaRPr lang="en-US" altLang="zh-TW" sz="4800" b="1" dirty="0">
-              <a:latin typeface="Microsoft JhengHei" pitchFamily="34" charset="-120"/>
-              <a:ea typeface="Microsoft JhengHei" pitchFamily="34" charset="-120"/>
-            </a:endParaRPr>
-          </a:p>
-          <a:p>
-            <a:pPr algn="ctr">
-              <a:buNone/>
-            </a:pPr>
-            <a:r>
-              <a:rPr lang="zh-TW" altLang="en-US" sz="4800" b="1" dirty="0">
-                <a:latin typeface="Microsoft JhengHei" pitchFamily="34" charset="-120"/>
-                <a:ea typeface="Microsoft JhengHei" pitchFamily="34" charset="-120"/>
-              </a:rPr>
-              <a:t>心中只想獻奉我深深敬拜</a:t>
-            </a:r>
           </a:p>
         </p:txBody>
       </p:sp>
@@ -3324,13 +3323,6 @@
   <p:clrMapOvr>
     <a:masterClrMapping/>
   </p:clrMapOvr>
-  <p:timing>
-    <p:tnLst>
-      <p:par>
-        <p:cTn id="1" dur="indefinite" restart="never" nodeType="tmRoot"/>
-      </p:par>
-    </p:tnLst>
-  </p:timing>
 </p:sld>
 </file>
 
@@ -3353,139 +3345,143 @@
       </p:grpSpPr>
       <p:sp>
         <p:nvSpPr>
-          <p:cNvPr id="2" name="標題 1"/>
-          <p:cNvSpPr>
-            <a:spLocks noGrp="1"/>
-          </p:cNvSpPr>
-          <p:nvPr>
-            <p:ph type="title"/>
-          </p:nvPr>
-        </p:nvSpPr>
-        <p:spPr/>
-        <p:txBody>
-          <a:bodyPr>
+          <p:cNvPr id="5" name="內容版面配置區 4"/>
+          <p:cNvSpPr>
+            <a:spLocks noGrp="1"/>
+          </p:cNvSpPr>
+          <p:nvPr>
+            <p:ph idx="1"/>
+          </p:nvPr>
+        </p:nvSpPr>
+        <p:spPr>
+          <a:xfrm>
+            <a:off x="0" y="1563638"/>
+            <a:ext cx="9144000" cy="1803647"/>
+          </a:xfrm>
+        </p:spPr>
+        <p:txBody>
+          <a:bodyPr anchor="ctr">
             <a:normAutofit/>
           </a:bodyPr>
           <a:lstStyle/>
           <a:p>
-            <a:r>
-              <a:rPr lang="zh-CN" altLang="en-US" sz="4000" b="1" dirty="0">
-                <a:latin typeface="Microsoft JhengHei" pitchFamily="34" charset="-120"/>
-                <a:ea typeface="Microsoft JhengHei" pitchFamily="34" charset="-120"/>
+            <a:pPr algn="ctr">
+              <a:buNone/>
+            </a:pPr>
+            <a:r>
+              <a:rPr lang="zh-TW" altLang="en-US" sz="4800" b="1" dirty="0">
+                <a:solidFill>
+                  <a:srgbClr val="000066"/>
+                </a:solidFill>
+                <a:latin typeface="微軟正黑體" pitchFamily="34" charset="-120"/>
+                <a:ea typeface="微軟正黑體" pitchFamily="34" charset="-120"/>
               </a:rPr>
-              <a:t>一首讚美的詩歌</a:t>
-            </a:r>
-            <a:endParaRPr lang="zh-TW" altLang="en-US" sz="4000" b="1" dirty="0">
-              <a:latin typeface="Microsoft JhengHei" pitchFamily="34" charset="-120"/>
-              <a:ea typeface="Microsoft JhengHei" pitchFamily="34" charset="-120"/>
+              <a:t>讓我心中所有意念</a:t>
+            </a:r>
+            <a:endParaRPr lang="en-US" altLang="zh-TW" sz="4800" b="1" dirty="0">
+              <a:solidFill>
+                <a:srgbClr val="000066"/>
+              </a:solidFill>
+              <a:latin typeface="微軟正黑體" pitchFamily="34" charset="-120"/>
+              <a:ea typeface="微軟正黑體" pitchFamily="34" charset="-120"/>
             </a:endParaRPr>
           </a:p>
-        </p:txBody>
-      </p:sp>
-      <p:sp>
-        <p:nvSpPr>
-          <p:cNvPr id="3" name="內容版面配置區 2"/>
-          <p:cNvSpPr>
-            <a:spLocks noGrp="1"/>
-          </p:cNvSpPr>
-          <p:nvPr>
-            <p:ph idx="1"/>
-          </p:nvPr>
+          <a:p>
+            <a:pPr algn="ctr">
+              <a:buNone/>
+            </a:pPr>
+            <a:r>
+              <a:rPr lang="zh-TW" altLang="en-US" sz="4800" b="1" dirty="0">
+                <a:solidFill>
+                  <a:srgbClr val="000066"/>
+                </a:solidFill>
+                <a:latin typeface="微軟正黑體" pitchFamily="34" charset="-120"/>
+                <a:ea typeface="微軟正黑體" pitchFamily="34" charset="-120"/>
+              </a:rPr>
+              <a:t>此刻都交主的手裡</a:t>
+            </a:r>
+            <a:endParaRPr lang="en-US" altLang="zh-TW" sz="4800" b="1" dirty="0">
+              <a:solidFill>
+                <a:srgbClr val="000066"/>
+              </a:solidFill>
+              <a:latin typeface="微軟正黑體" pitchFamily="34" charset="-120"/>
+              <a:ea typeface="微軟正黑體" pitchFamily="34" charset="-120"/>
+            </a:endParaRPr>
+          </a:p>
+        </p:txBody>
+      </p:sp>
+      <p:sp>
+        <p:nvSpPr>
+          <p:cNvPr id="3" name="TextBox 2"/>
+          <p:cNvSpPr txBox="1"/>
+          <p:nvPr/>
         </p:nvSpPr>
         <p:spPr>
           <a:xfrm>
-            <a:off x="0" y="1200150"/>
-            <a:ext cx="9144000" cy="3943350"/>
+            <a:off x="0" y="3867894"/>
+            <a:ext cx="9144000" cy="461665"/>
           </a:xfrm>
+          <a:prstGeom prst="rect">
+            <a:avLst/>
+          </a:prstGeom>
+          <a:noFill/>
         </p:spPr>
         <p:txBody>
-          <a:bodyPr>
-            <a:noAutofit/>
+          <a:bodyPr wrap="square" rtlCol="0">
+            <a:spAutoFit/>
           </a:bodyPr>
           <a:lstStyle/>
           <a:p>
-            <a:pPr algn="ctr">
-              <a:buNone/>
-            </a:pPr>
-            <a:r>
-              <a:rPr lang="zh-TW" altLang="en-US" sz="4800" b="1" dirty="0">
-                <a:latin typeface="Microsoft JhengHei" pitchFamily="34" charset="-120"/>
-                <a:ea typeface="Microsoft JhengHei" pitchFamily="34" charset="-120"/>
+            <a:pPr algn="ctr"/>
+            <a:r>
+              <a:rPr lang="en-US" sz="2400" b="1" dirty="0">
+                <a:solidFill>
+                  <a:srgbClr val="000066"/>
+                </a:solidFill>
+                <a:latin typeface="Microsoft JhengHei" panose="020B0604030504040204" pitchFamily="34" charset="-120"/>
+                <a:ea typeface="Microsoft JhengHei" panose="020B0604030504040204" pitchFamily="34" charset="-120"/>
               </a:rPr>
-              <a:t>人活著原是要歌頌讚揚</a:t>
-            </a:r>
-            <a:endParaRPr lang="en-US" altLang="zh-TW" sz="4800" b="1" dirty="0">
-              <a:latin typeface="Microsoft JhengHei" pitchFamily="34" charset="-120"/>
-              <a:ea typeface="Microsoft JhengHei" pitchFamily="34" charset="-120"/>
+              <a:t>( </a:t>
+            </a:r>
+            <a:r>
+              <a:rPr lang="zh-CN" altLang="en-US" sz="2400" b="1" dirty="0">
+                <a:solidFill>
+                  <a:srgbClr val="000066"/>
+                </a:solidFill>
+                <a:latin typeface="Microsoft JhengHei" panose="020B0604030504040204" pitchFamily="34" charset="-120"/>
+                <a:ea typeface="Microsoft JhengHei" panose="020B0604030504040204" pitchFamily="34" charset="-120"/>
+              </a:rPr>
+              <a:t>正歌</a:t>
+            </a:r>
+            <a:r>
+              <a:rPr lang="en-US" sz="2400" b="1" dirty="0">
+                <a:solidFill>
+                  <a:srgbClr val="000066"/>
+                </a:solidFill>
+                <a:latin typeface="Microsoft JhengHei" panose="020B0604030504040204" pitchFamily="34" charset="-120"/>
+                <a:ea typeface="Microsoft JhengHei" panose="020B0604030504040204" pitchFamily="34" charset="-120"/>
+              </a:rPr>
+              <a:t> )</a:t>
+            </a:r>
+            <a:endParaRPr lang="vi-VN" sz="2400" b="1" dirty="0">
+              <a:solidFill>
+                <a:srgbClr val="000066"/>
+              </a:solidFill>
+              <a:ea typeface="Microsoft JhengHei" panose="020B0604030504040204" pitchFamily="34" charset="-120"/>
             </a:endParaRPr>
           </a:p>
-          <a:p>
-            <a:pPr algn="ctr">
-              <a:buNone/>
-            </a:pPr>
-            <a:r>
-              <a:rPr lang="zh-TW" altLang="en-US" sz="4800" b="1" dirty="0">
-                <a:latin typeface="Microsoft JhengHei" pitchFamily="34" charset="-120"/>
-                <a:ea typeface="Microsoft JhengHei" pitchFamily="34" charset="-120"/>
-              </a:rPr>
-              <a:t>創造我的主  </a:t>
-            </a:r>
-            <a:endParaRPr lang="en-US" altLang="zh-TW" sz="4800" b="1" dirty="0" smtClean="0">
-              <a:latin typeface="Microsoft JhengHei" pitchFamily="34" charset="-120"/>
-              <a:ea typeface="Microsoft JhengHei" pitchFamily="34" charset="-120"/>
-            </a:endParaRPr>
-          </a:p>
-          <a:p>
-            <a:pPr algn="ctr">
-              <a:buNone/>
-            </a:pPr>
-            <a:r>
-              <a:rPr lang="zh-CN" altLang="en-US" sz="4800" b="1" dirty="0">
-                <a:latin typeface="Microsoft JhengHei" pitchFamily="34" charset="-120"/>
-                <a:ea typeface="Microsoft JhengHei" pitchFamily="34" charset="-120"/>
-              </a:rPr>
-              <a:t>袮</a:t>
-            </a:r>
-            <a:r>
-              <a:rPr lang="zh-TW" altLang="en-US" sz="4800" b="1" dirty="0" smtClean="0">
-                <a:latin typeface="Microsoft JhengHei" pitchFamily="34" charset="-120"/>
-                <a:ea typeface="Microsoft JhengHei" pitchFamily="34" charset="-120"/>
-              </a:rPr>
-              <a:t>是</a:t>
-            </a:r>
-            <a:r>
-              <a:rPr lang="zh-TW" altLang="en-US" sz="4800" b="1" dirty="0">
-                <a:latin typeface="Microsoft JhengHei" pitchFamily="34" charset="-120"/>
-                <a:ea typeface="Microsoft JhengHei" pitchFamily="34" charset="-120"/>
-              </a:rPr>
-              <a:t>配得榮</a:t>
-            </a:r>
-            <a:r>
-              <a:rPr lang="zh-TW" altLang="en-US" sz="4800" b="1" dirty="0" smtClean="0">
-                <a:latin typeface="Microsoft JhengHei" pitchFamily="34" charset="-120"/>
-                <a:ea typeface="Microsoft JhengHei" pitchFamily="34" charset="-120"/>
-              </a:rPr>
-              <a:t>耀</a:t>
-            </a:r>
-            <a:endParaRPr lang="en-US" altLang="zh-TW" sz="4800" b="1" dirty="0">
-              <a:latin typeface="Microsoft JhengHei" pitchFamily="34" charset="-120"/>
-              <a:ea typeface="Microsoft JhengHei" pitchFamily="34" charset="-120"/>
-            </a:endParaRPr>
-          </a:p>
         </p:txBody>
       </p:sp>
     </p:spTree>
+    <p:extLst>
+      <p:ext uri="{BB962C8B-B14F-4D97-AF65-F5344CB8AC3E}">
+        <p14:creationId xmlns:p14="http://schemas.microsoft.com/office/powerpoint/2010/main" val="1675277724"/>
+      </p:ext>
+    </p:extLst>
   </p:cSld>
   <p:clrMapOvr>
     <a:masterClrMapping/>
   </p:clrMapOvr>
-  <p:timing>
-    <p:tnLst>
-      <p:par>
-        <p:cTn id="1" dur="indefinite" restart="never" nodeType="tmRoot"/>
-      </p:par>
-    </p:tnLst>
-  </p:timing>
 </p:sld>
 </file>
 
@@ -3508,140 +3504,592 @@
       </p:grpSpPr>
       <p:sp>
         <p:nvSpPr>
-          <p:cNvPr id="2" name="標題 1"/>
-          <p:cNvSpPr>
-            <a:spLocks noGrp="1"/>
-          </p:cNvSpPr>
-          <p:nvPr>
-            <p:ph type="title"/>
-          </p:nvPr>
-        </p:nvSpPr>
-        <p:spPr/>
-        <p:txBody>
-          <a:bodyPr>
+          <p:cNvPr id="5" name="內容版面配置區 4"/>
+          <p:cNvSpPr>
+            <a:spLocks noGrp="1"/>
+          </p:cNvSpPr>
+          <p:nvPr>
+            <p:ph idx="1"/>
+          </p:nvPr>
+        </p:nvSpPr>
+        <p:spPr>
+          <a:xfrm>
+            <a:off x="0" y="1563638"/>
+            <a:ext cx="9144000" cy="1803647"/>
+          </a:xfrm>
+        </p:spPr>
+        <p:txBody>
+          <a:bodyPr anchor="ctr">
             <a:normAutofit/>
           </a:bodyPr>
           <a:lstStyle/>
           <a:p>
-            <a:r>
-              <a:rPr lang="zh-CN" altLang="en-US" sz="4000" b="1" dirty="0">
-                <a:latin typeface="Microsoft JhengHei" pitchFamily="34" charset="-120"/>
-                <a:ea typeface="Microsoft JhengHei" pitchFamily="34" charset="-120"/>
+            <a:pPr algn="ctr">
+              <a:buNone/>
+            </a:pPr>
+            <a:r>
+              <a:rPr lang="zh-TW" altLang="en-US" sz="4800" b="1" dirty="0">
+                <a:solidFill>
+                  <a:srgbClr val="000066"/>
+                </a:solidFill>
+                <a:latin typeface="微軟正黑體" pitchFamily="34" charset="-120"/>
+                <a:ea typeface="微軟正黑體" pitchFamily="34" charset="-120"/>
               </a:rPr>
-              <a:t>一首讚美的詩歌</a:t>
-            </a:r>
-            <a:endParaRPr lang="zh-TW" altLang="en-US" sz="4000" b="1" dirty="0">
-              <a:latin typeface="Microsoft JhengHei" pitchFamily="34" charset="-120"/>
-              <a:ea typeface="Microsoft JhengHei" pitchFamily="34" charset="-120"/>
-            </a:endParaRPr>
-          </a:p>
-        </p:txBody>
-      </p:sp>
-      <p:sp>
-        <p:nvSpPr>
-          <p:cNvPr id="3" name="內容版面配置區 2"/>
-          <p:cNvSpPr>
-            <a:spLocks noGrp="1"/>
-          </p:cNvSpPr>
-          <p:nvPr>
-            <p:ph idx="1"/>
-          </p:nvPr>
+              <a:t>心中只想獻奉我深深敬拜</a:t>
+            </a:r>
+          </a:p>
+        </p:txBody>
+      </p:sp>
+      <p:sp>
+        <p:nvSpPr>
+          <p:cNvPr id="3" name="TextBox 2"/>
+          <p:cNvSpPr txBox="1"/>
+          <p:nvPr/>
         </p:nvSpPr>
         <p:spPr>
           <a:xfrm>
-            <a:off x="0" y="1200150"/>
-            <a:ext cx="9144000" cy="3943350"/>
+            <a:off x="0" y="3867894"/>
+            <a:ext cx="9144000" cy="461665"/>
           </a:xfrm>
+          <a:prstGeom prst="rect">
+            <a:avLst/>
+          </a:prstGeom>
+          <a:noFill/>
         </p:spPr>
         <p:txBody>
-          <a:bodyPr>
-            <a:noAutofit/>
+          <a:bodyPr wrap="square" rtlCol="0">
+            <a:spAutoFit/>
           </a:bodyPr>
           <a:lstStyle/>
           <a:p>
-            <a:pPr algn="ctr">
-              <a:buNone/>
-            </a:pPr>
-            <a:r>
-              <a:rPr lang="zh-TW" altLang="en-US" sz="4800" b="1" dirty="0" smtClean="0">
-                <a:latin typeface="Microsoft JhengHei" pitchFamily="34" charset="-120"/>
-                <a:ea typeface="Microsoft JhengHei" pitchFamily="34" charset="-120"/>
+            <a:pPr algn="ctr"/>
+            <a:r>
+              <a:rPr lang="en-US" sz="2400" b="1" dirty="0">
+                <a:solidFill>
+                  <a:srgbClr val="000066"/>
+                </a:solidFill>
+                <a:latin typeface="Microsoft JhengHei" panose="020B0604030504040204" pitchFamily="34" charset="-120"/>
+                <a:ea typeface="Microsoft JhengHei" panose="020B0604030504040204" pitchFamily="34" charset="-120"/>
               </a:rPr>
-              <a:t>人</a:t>
-            </a:r>
-            <a:r>
-              <a:rPr lang="zh-TW" altLang="en-US" sz="4800" b="1" dirty="0">
-                <a:latin typeface="Microsoft JhengHei" pitchFamily="34" charset="-120"/>
-                <a:ea typeface="Microsoft JhengHei" pitchFamily="34" charset="-120"/>
+              <a:t>( </a:t>
+            </a:r>
+            <a:r>
+              <a:rPr lang="zh-CN" altLang="en-US" sz="2400" b="1" dirty="0">
+                <a:solidFill>
+                  <a:srgbClr val="000066"/>
+                </a:solidFill>
+                <a:latin typeface="Microsoft JhengHei" panose="020B0604030504040204" pitchFamily="34" charset="-120"/>
+                <a:ea typeface="Microsoft JhengHei" panose="020B0604030504040204" pitchFamily="34" charset="-120"/>
               </a:rPr>
-              <a:t>活著原是要將榮耀</a:t>
-            </a:r>
-            <a:r>
-              <a:rPr lang="zh-TW" altLang="en-US" sz="4800" b="1" dirty="0" smtClean="0">
-                <a:latin typeface="Microsoft JhengHei" pitchFamily="34" charset="-120"/>
-                <a:ea typeface="Microsoft JhengHei" pitchFamily="34" charset="-120"/>
+              <a:t>正歌</a:t>
+            </a:r>
+            <a:r>
+              <a:rPr lang="en-US" sz="2400" b="1" dirty="0">
+                <a:solidFill>
+                  <a:srgbClr val="000066"/>
+                </a:solidFill>
+                <a:latin typeface="Microsoft JhengHei" panose="020B0604030504040204" pitchFamily="34" charset="-120"/>
+                <a:ea typeface="Microsoft JhengHei" panose="020B0604030504040204" pitchFamily="34" charset="-120"/>
               </a:rPr>
-              <a:t>歸</a:t>
-            </a:r>
-            <a:r>
-              <a:rPr lang="zh-CN" altLang="en-US" sz="4800" b="1" dirty="0">
-                <a:latin typeface="Microsoft JhengHei" pitchFamily="34" charset="-120"/>
-                <a:ea typeface="Microsoft JhengHei" pitchFamily="34" charset="-120"/>
-              </a:rPr>
-              <a:t>袮</a:t>
-            </a:r>
-            <a:endParaRPr lang="en-US" altLang="zh-TW" sz="4800" b="1" dirty="0">
-              <a:latin typeface="Microsoft JhengHei" pitchFamily="34" charset="-120"/>
-              <a:ea typeface="Microsoft JhengHei" pitchFamily="34" charset="-120"/>
+              <a:t> )</a:t>
+            </a:r>
+            <a:endParaRPr lang="vi-VN" sz="2400" b="1" dirty="0">
+              <a:solidFill>
+                <a:srgbClr val="000066"/>
+              </a:solidFill>
+              <a:ea typeface="Microsoft JhengHei" panose="020B0604030504040204" pitchFamily="34" charset="-120"/>
             </a:endParaRPr>
-          </a:p>
-          <a:p>
-            <a:pPr algn="ctr">
-              <a:buNone/>
-            </a:pPr>
-            <a:r>
-              <a:rPr lang="zh-TW" altLang="en-US" sz="4800" b="1" dirty="0">
-                <a:latin typeface="Microsoft JhengHei" pitchFamily="34" charset="-120"/>
-                <a:ea typeface="Microsoft JhengHei" pitchFamily="34" charset="-120"/>
-              </a:rPr>
-              <a:t>一首讚美的詩歌</a:t>
-            </a:r>
-            <a:endParaRPr lang="en-US" altLang="zh-TW" sz="4800" b="1" dirty="0">
-              <a:latin typeface="Microsoft JhengHei" pitchFamily="34" charset="-120"/>
-              <a:ea typeface="Microsoft JhengHei" pitchFamily="34" charset="-120"/>
-            </a:endParaRPr>
-          </a:p>
-          <a:p>
-            <a:pPr algn="ctr">
-              <a:buNone/>
-            </a:pPr>
-            <a:r>
-              <a:rPr lang="zh-TW" altLang="en-US" sz="4800" b="1" dirty="0">
-                <a:latin typeface="Microsoft JhengHei" pitchFamily="34" charset="-120"/>
-                <a:ea typeface="Microsoft JhengHei" pitchFamily="34" charset="-120"/>
-              </a:rPr>
-              <a:t>願帶我到寶座前敬拜</a:t>
-            </a:r>
           </a:p>
         </p:txBody>
       </p:sp>
     </p:spTree>
     <p:extLst>
       <p:ext uri="{BB962C8B-B14F-4D97-AF65-F5344CB8AC3E}">
-        <p14:creationId xmlns:p14="http://schemas.microsoft.com/office/powerpoint/2010/main" val="194390261"/>
+        <p14:creationId xmlns:p14="http://schemas.microsoft.com/office/powerpoint/2010/main" val="229447728"/>
       </p:ext>
     </p:extLst>
   </p:cSld>
   <p:clrMapOvr>
     <a:masterClrMapping/>
   </p:clrMapOvr>
-  <p:timing>
-    <p:tnLst>
-      <p:par>
-        <p:cTn id="1" dur="indefinite" restart="never" nodeType="tmRoot"/>
-      </p:par>
-    </p:tnLst>
-  </p:timing>
+</p:sld>
+</file>
+
+<file path=ppt/slides/slide5.xml><?xml version="1.0" encoding="utf-8"?>
+<p:sld xmlns:a="http://schemas.openxmlformats.org/drawingml/2006/main" xmlns:r="http://schemas.openxmlformats.org/officeDocument/2006/relationships" xmlns:p="http://schemas.openxmlformats.org/presentationml/2006/main">
+  <p:cSld>
+    <p:spTree>
+      <p:nvGrpSpPr>
+        <p:cNvPr id="1" name=""/>
+        <p:cNvGrpSpPr/>
+        <p:nvPr/>
+      </p:nvGrpSpPr>
+      <p:grpSpPr>
+        <a:xfrm>
+          <a:off x="0" y="0"/>
+          <a:ext cx="0" cy="0"/>
+          <a:chOff x="0" y="0"/>
+          <a:chExt cx="0" cy="0"/>
+        </a:xfrm>
+      </p:grpSpPr>
+      <p:sp>
+        <p:nvSpPr>
+          <p:cNvPr id="5" name="內容版面配置區 4"/>
+          <p:cNvSpPr>
+            <a:spLocks noGrp="1"/>
+          </p:cNvSpPr>
+          <p:nvPr>
+            <p:ph idx="1"/>
+          </p:nvPr>
+        </p:nvSpPr>
+        <p:spPr>
+          <a:xfrm>
+            <a:off x="0" y="1563638"/>
+            <a:ext cx="9144000" cy="1803647"/>
+          </a:xfrm>
+        </p:spPr>
+        <p:txBody>
+          <a:bodyPr anchor="ctr">
+            <a:normAutofit/>
+          </a:bodyPr>
+          <a:lstStyle/>
+          <a:p>
+            <a:pPr algn="ctr">
+              <a:buNone/>
+            </a:pPr>
+            <a:r>
+              <a:rPr lang="zh-TW" altLang="en-US" sz="4800" b="1" dirty="0">
+                <a:solidFill>
+                  <a:srgbClr val="000066"/>
+                </a:solidFill>
+                <a:latin typeface="微軟正黑體" pitchFamily="34" charset="-120"/>
+                <a:ea typeface="微軟正黑體" pitchFamily="34" charset="-120"/>
+              </a:rPr>
+              <a:t>人活著原是要歌頌讚揚</a:t>
+            </a:r>
+            <a:endParaRPr lang="en-US" altLang="zh-TW" sz="4800" b="1" dirty="0">
+              <a:solidFill>
+                <a:srgbClr val="000066"/>
+              </a:solidFill>
+              <a:latin typeface="微軟正黑體" pitchFamily="34" charset="-120"/>
+              <a:ea typeface="微軟正黑體" pitchFamily="34" charset="-120"/>
+            </a:endParaRPr>
+          </a:p>
+          <a:p>
+            <a:pPr algn="ctr">
+              <a:buNone/>
+            </a:pPr>
+            <a:r>
+              <a:rPr lang="zh-TW" altLang="en-US" sz="4800" b="1" dirty="0">
+                <a:solidFill>
+                  <a:srgbClr val="000066"/>
+                </a:solidFill>
+                <a:latin typeface="微軟正黑體" pitchFamily="34" charset="-120"/>
+                <a:ea typeface="微軟正黑體" pitchFamily="34" charset="-120"/>
+              </a:rPr>
+              <a:t>創造我的主  </a:t>
+            </a:r>
+            <a:r>
+              <a:rPr lang="zh-CN" altLang="en-US" sz="4800" b="1" dirty="0">
+                <a:solidFill>
+                  <a:srgbClr val="000066"/>
+                </a:solidFill>
+                <a:latin typeface="微軟正黑體" pitchFamily="34" charset="-120"/>
+                <a:ea typeface="微軟正黑體" pitchFamily="34" charset="-120"/>
+              </a:rPr>
+              <a:t>祢</a:t>
+            </a:r>
+            <a:r>
+              <a:rPr lang="zh-TW" altLang="en-US" sz="4800" b="1" dirty="0">
+                <a:solidFill>
+                  <a:srgbClr val="000066"/>
+                </a:solidFill>
+                <a:latin typeface="微軟正黑體" pitchFamily="34" charset="-120"/>
+                <a:ea typeface="微軟正黑體" pitchFamily="34" charset="-120"/>
+              </a:rPr>
+              <a:t>是配得榮耀</a:t>
+            </a:r>
+            <a:endParaRPr lang="en-US" altLang="zh-TW" sz="4800" b="1" dirty="0">
+              <a:solidFill>
+                <a:srgbClr val="000066"/>
+              </a:solidFill>
+              <a:latin typeface="微軟正黑體" pitchFamily="34" charset="-120"/>
+              <a:ea typeface="微軟正黑體" pitchFamily="34" charset="-120"/>
+            </a:endParaRPr>
+          </a:p>
+        </p:txBody>
+      </p:sp>
+      <p:sp>
+        <p:nvSpPr>
+          <p:cNvPr id="3" name="TextBox 2"/>
+          <p:cNvSpPr txBox="1"/>
+          <p:nvPr/>
+        </p:nvSpPr>
+        <p:spPr>
+          <a:xfrm>
+            <a:off x="0" y="3867894"/>
+            <a:ext cx="9144000" cy="461665"/>
+          </a:xfrm>
+          <a:prstGeom prst="rect">
+            <a:avLst/>
+          </a:prstGeom>
+          <a:noFill/>
+        </p:spPr>
+        <p:txBody>
+          <a:bodyPr wrap="square" rtlCol="0">
+            <a:spAutoFit/>
+          </a:bodyPr>
+          <a:lstStyle/>
+          <a:p>
+            <a:pPr algn="ctr"/>
+            <a:r>
+              <a:rPr lang="en-US" sz="2400" b="1" dirty="0">
+                <a:solidFill>
+                  <a:srgbClr val="000066"/>
+                </a:solidFill>
+                <a:latin typeface="Microsoft JhengHei" panose="020B0604030504040204" pitchFamily="34" charset="-120"/>
+                <a:ea typeface="Microsoft JhengHei" panose="020B0604030504040204" pitchFamily="34" charset="-120"/>
+              </a:rPr>
+              <a:t>( </a:t>
+            </a:r>
+            <a:r>
+              <a:rPr lang="zh-CN" altLang="en-US" sz="2400" b="1" dirty="0">
+                <a:solidFill>
+                  <a:srgbClr val="000066"/>
+                </a:solidFill>
+                <a:latin typeface="Microsoft JhengHei" panose="020B0604030504040204" pitchFamily="34" charset="-120"/>
+                <a:ea typeface="Microsoft JhengHei" panose="020B0604030504040204" pitchFamily="34" charset="-120"/>
+              </a:rPr>
+              <a:t>副歌</a:t>
+            </a:r>
+            <a:r>
+              <a:rPr lang="en-US" sz="2400" b="1" dirty="0">
+                <a:solidFill>
+                  <a:srgbClr val="000066"/>
+                </a:solidFill>
+                <a:latin typeface="Microsoft JhengHei" panose="020B0604030504040204" pitchFamily="34" charset="-120"/>
+                <a:ea typeface="Microsoft JhengHei" panose="020B0604030504040204" pitchFamily="34" charset="-120"/>
+              </a:rPr>
+              <a:t> )</a:t>
+            </a:r>
+            <a:endParaRPr lang="vi-VN" sz="2400" b="1" dirty="0">
+              <a:solidFill>
+                <a:srgbClr val="000066"/>
+              </a:solidFill>
+              <a:ea typeface="Microsoft JhengHei" panose="020B0604030504040204" pitchFamily="34" charset="-120"/>
+            </a:endParaRPr>
+          </a:p>
+        </p:txBody>
+      </p:sp>
+    </p:spTree>
+    <p:extLst>
+      <p:ext uri="{BB962C8B-B14F-4D97-AF65-F5344CB8AC3E}">
+        <p14:creationId xmlns:p14="http://schemas.microsoft.com/office/powerpoint/2010/main" val="2636745792"/>
+      </p:ext>
+    </p:extLst>
+  </p:cSld>
+  <p:clrMapOvr>
+    <a:masterClrMapping/>
+  </p:clrMapOvr>
+</p:sld>
+</file>
+
+<file path=ppt/slides/slide6.xml><?xml version="1.0" encoding="utf-8"?>
+<p:sld xmlns:a="http://schemas.openxmlformats.org/drawingml/2006/main" xmlns:r="http://schemas.openxmlformats.org/officeDocument/2006/relationships" xmlns:p="http://schemas.openxmlformats.org/presentationml/2006/main">
+  <p:cSld>
+    <p:spTree>
+      <p:nvGrpSpPr>
+        <p:cNvPr id="1" name=""/>
+        <p:cNvGrpSpPr/>
+        <p:nvPr/>
+      </p:nvGrpSpPr>
+      <p:grpSpPr>
+        <a:xfrm>
+          <a:off x="0" y="0"/>
+          <a:ext cx="0" cy="0"/>
+          <a:chOff x="0" y="0"/>
+          <a:chExt cx="0" cy="0"/>
+        </a:xfrm>
+      </p:grpSpPr>
+      <p:sp>
+        <p:nvSpPr>
+          <p:cNvPr id="5" name="內容版面配置區 4"/>
+          <p:cNvSpPr>
+            <a:spLocks noGrp="1"/>
+          </p:cNvSpPr>
+          <p:nvPr>
+            <p:ph idx="1"/>
+          </p:nvPr>
+        </p:nvSpPr>
+        <p:spPr>
+          <a:xfrm>
+            <a:off x="0" y="1563638"/>
+            <a:ext cx="9144000" cy="1803647"/>
+          </a:xfrm>
+        </p:spPr>
+        <p:txBody>
+          <a:bodyPr anchor="ctr">
+            <a:normAutofit/>
+          </a:bodyPr>
+          <a:lstStyle/>
+          <a:p>
+            <a:pPr algn="ctr">
+              <a:buNone/>
+            </a:pPr>
+            <a:r>
+              <a:rPr lang="zh-TW" altLang="en-US" sz="4800" b="1" dirty="0">
+                <a:solidFill>
+                  <a:srgbClr val="000066"/>
+                </a:solidFill>
+                <a:latin typeface="微軟正黑體" pitchFamily="34" charset="-120"/>
+                <a:ea typeface="微軟正黑體" pitchFamily="34" charset="-120"/>
+              </a:rPr>
+              <a:t>人活著原是要將榮耀歸</a:t>
+            </a:r>
+            <a:r>
+              <a:rPr lang="zh-CN" altLang="en-US" sz="4800" b="1" dirty="0">
+                <a:solidFill>
+                  <a:srgbClr val="000066"/>
+                </a:solidFill>
+                <a:latin typeface="微軟正黑體" pitchFamily="34" charset="-120"/>
+                <a:ea typeface="微軟正黑體" pitchFamily="34" charset="-120"/>
+              </a:rPr>
+              <a:t>祢</a:t>
+            </a:r>
+            <a:endParaRPr lang="en-US" altLang="zh-TW" sz="4800" b="1" dirty="0">
+              <a:solidFill>
+                <a:srgbClr val="000066"/>
+              </a:solidFill>
+              <a:latin typeface="微軟正黑體" pitchFamily="34" charset="-120"/>
+              <a:ea typeface="微軟正黑體" pitchFamily="34" charset="-120"/>
+            </a:endParaRPr>
+          </a:p>
+          <a:p>
+            <a:pPr algn="ctr">
+              <a:buNone/>
+            </a:pPr>
+            <a:r>
+              <a:rPr lang="zh-TW" altLang="en-US" sz="4800" b="1" dirty="0">
+                <a:solidFill>
+                  <a:srgbClr val="000066"/>
+                </a:solidFill>
+                <a:latin typeface="微軟正黑體" pitchFamily="34" charset="-120"/>
+                <a:ea typeface="微軟正黑體" pitchFamily="34" charset="-120"/>
+              </a:rPr>
+              <a:t>一首讚美的詩歌</a:t>
+            </a:r>
+            <a:endParaRPr lang="en-US" altLang="zh-TW" sz="4800" b="1" dirty="0">
+              <a:solidFill>
+                <a:srgbClr val="000066"/>
+              </a:solidFill>
+              <a:latin typeface="微軟正黑體" pitchFamily="34" charset="-120"/>
+              <a:ea typeface="微軟正黑體" pitchFamily="34" charset="-120"/>
+            </a:endParaRPr>
+          </a:p>
+        </p:txBody>
+      </p:sp>
+      <p:sp>
+        <p:nvSpPr>
+          <p:cNvPr id="3" name="TextBox 2"/>
+          <p:cNvSpPr txBox="1"/>
+          <p:nvPr/>
+        </p:nvSpPr>
+        <p:spPr>
+          <a:xfrm>
+            <a:off x="0" y="3867894"/>
+            <a:ext cx="9144000" cy="461665"/>
+          </a:xfrm>
+          <a:prstGeom prst="rect">
+            <a:avLst/>
+          </a:prstGeom>
+          <a:noFill/>
+        </p:spPr>
+        <p:txBody>
+          <a:bodyPr wrap="square" rtlCol="0">
+            <a:spAutoFit/>
+          </a:bodyPr>
+          <a:lstStyle/>
+          <a:p>
+            <a:pPr algn="ctr"/>
+            <a:r>
+              <a:rPr lang="en-US" sz="2400" b="1" dirty="0">
+                <a:solidFill>
+                  <a:srgbClr val="000066"/>
+                </a:solidFill>
+                <a:latin typeface="Microsoft JhengHei" panose="020B0604030504040204" pitchFamily="34" charset="-120"/>
+                <a:ea typeface="Microsoft JhengHei" panose="020B0604030504040204" pitchFamily="34" charset="-120"/>
+              </a:rPr>
+              <a:t>( </a:t>
+            </a:r>
+            <a:r>
+              <a:rPr lang="zh-CN" altLang="en-US" sz="2400" b="1" dirty="0">
+                <a:solidFill>
+                  <a:srgbClr val="000066"/>
+                </a:solidFill>
+                <a:latin typeface="Microsoft JhengHei" panose="020B0604030504040204" pitchFamily="34" charset="-120"/>
+                <a:ea typeface="Microsoft JhengHei" panose="020B0604030504040204" pitchFamily="34" charset="-120"/>
+              </a:rPr>
+              <a:t>副歌</a:t>
+            </a:r>
+            <a:r>
+              <a:rPr lang="en-US" sz="2400" b="1" dirty="0">
+                <a:solidFill>
+                  <a:srgbClr val="000066"/>
+                </a:solidFill>
+                <a:latin typeface="Microsoft JhengHei" panose="020B0604030504040204" pitchFamily="34" charset="-120"/>
+                <a:ea typeface="Microsoft JhengHei" panose="020B0604030504040204" pitchFamily="34" charset="-120"/>
+              </a:rPr>
+              <a:t> )</a:t>
+            </a:r>
+            <a:endParaRPr lang="vi-VN" sz="2400" b="1" dirty="0">
+              <a:solidFill>
+                <a:srgbClr val="000066"/>
+              </a:solidFill>
+              <a:ea typeface="Microsoft JhengHei" panose="020B0604030504040204" pitchFamily="34" charset="-120"/>
+            </a:endParaRPr>
+          </a:p>
+        </p:txBody>
+      </p:sp>
+    </p:spTree>
+    <p:extLst>
+      <p:ext uri="{BB962C8B-B14F-4D97-AF65-F5344CB8AC3E}">
+        <p14:creationId xmlns:p14="http://schemas.microsoft.com/office/powerpoint/2010/main" val="2899743918"/>
+      </p:ext>
+    </p:extLst>
+  </p:cSld>
+  <p:clrMapOvr>
+    <a:masterClrMapping/>
+  </p:clrMapOvr>
+</p:sld>
+</file>
+
+<file path=ppt/slides/slide7.xml><?xml version="1.0" encoding="utf-8"?>
+<p:sld xmlns:a="http://schemas.openxmlformats.org/drawingml/2006/main" xmlns:r="http://schemas.openxmlformats.org/officeDocument/2006/relationships" xmlns:p="http://schemas.openxmlformats.org/presentationml/2006/main">
+  <p:cSld>
+    <p:spTree>
+      <p:nvGrpSpPr>
+        <p:cNvPr id="1" name=""/>
+        <p:cNvGrpSpPr/>
+        <p:nvPr/>
+      </p:nvGrpSpPr>
+      <p:grpSpPr>
+        <a:xfrm>
+          <a:off x="0" y="0"/>
+          <a:ext cx="0" cy="0"/>
+          <a:chOff x="0" y="0"/>
+          <a:chExt cx="0" cy="0"/>
+        </a:xfrm>
+      </p:grpSpPr>
+      <p:sp>
+        <p:nvSpPr>
+          <p:cNvPr id="5" name="內容版面配置區 4"/>
+          <p:cNvSpPr>
+            <a:spLocks noGrp="1"/>
+          </p:cNvSpPr>
+          <p:nvPr>
+            <p:ph idx="1"/>
+          </p:nvPr>
+        </p:nvSpPr>
+        <p:spPr>
+          <a:xfrm>
+            <a:off x="0" y="1563638"/>
+            <a:ext cx="9144000" cy="1803647"/>
+          </a:xfrm>
+        </p:spPr>
+        <p:txBody>
+          <a:bodyPr anchor="ctr">
+            <a:normAutofit/>
+          </a:bodyPr>
+          <a:lstStyle/>
+          <a:p>
+            <a:pPr algn="ctr">
+              <a:buNone/>
+            </a:pPr>
+            <a:r>
+              <a:rPr lang="zh-TW" altLang="en-US" sz="4800" b="1" dirty="0">
+                <a:solidFill>
+                  <a:srgbClr val="000066"/>
+                </a:solidFill>
+                <a:latin typeface="微軟正黑體" pitchFamily="34" charset="-120"/>
+                <a:ea typeface="微軟正黑體" pitchFamily="34" charset="-120"/>
+              </a:rPr>
+              <a:t>願帶我到寶座前敬拜</a:t>
+            </a:r>
+          </a:p>
+        </p:txBody>
+      </p:sp>
+      <p:sp>
+        <p:nvSpPr>
+          <p:cNvPr id="3" name="TextBox 2"/>
+          <p:cNvSpPr txBox="1"/>
+          <p:nvPr/>
+        </p:nvSpPr>
+        <p:spPr>
+          <a:xfrm>
+            <a:off x="0" y="3867894"/>
+            <a:ext cx="9144000" cy="461665"/>
+          </a:xfrm>
+          <a:prstGeom prst="rect">
+            <a:avLst/>
+          </a:prstGeom>
+          <a:noFill/>
+        </p:spPr>
+        <p:txBody>
+          <a:bodyPr wrap="square" rtlCol="0">
+            <a:spAutoFit/>
+          </a:bodyPr>
+          <a:lstStyle/>
+          <a:p>
+            <a:pPr algn="ctr"/>
+            <a:r>
+              <a:rPr lang="en-US" sz="2400" b="1" dirty="0">
+                <a:solidFill>
+                  <a:srgbClr val="000066"/>
+                </a:solidFill>
+                <a:latin typeface="Microsoft JhengHei" panose="020B0604030504040204" pitchFamily="34" charset="-120"/>
+                <a:ea typeface="Microsoft JhengHei" panose="020B0604030504040204" pitchFamily="34" charset="-120"/>
+              </a:rPr>
+              <a:t>( </a:t>
+            </a:r>
+            <a:r>
+              <a:rPr lang="zh-CN" altLang="en-US" sz="2400" b="1" dirty="0">
+                <a:solidFill>
+                  <a:srgbClr val="000066"/>
+                </a:solidFill>
+                <a:latin typeface="Microsoft JhengHei" panose="020B0604030504040204" pitchFamily="34" charset="-120"/>
+                <a:ea typeface="Microsoft JhengHei" panose="020B0604030504040204" pitchFamily="34" charset="-120"/>
+              </a:rPr>
+              <a:t>副歌</a:t>
+            </a:r>
+            <a:r>
+              <a:rPr lang="en-US" sz="2400" b="1" dirty="0">
+                <a:solidFill>
+                  <a:srgbClr val="000066"/>
+                </a:solidFill>
+                <a:latin typeface="Microsoft JhengHei" panose="020B0604030504040204" pitchFamily="34" charset="-120"/>
+                <a:ea typeface="Microsoft JhengHei" panose="020B0604030504040204" pitchFamily="34" charset="-120"/>
+              </a:rPr>
+              <a:t> )</a:t>
+            </a:r>
+            <a:endParaRPr lang="vi-VN" sz="2400" b="1" dirty="0">
+              <a:solidFill>
+                <a:srgbClr val="000066"/>
+              </a:solidFill>
+              <a:ea typeface="Microsoft JhengHei" panose="020B0604030504040204" pitchFamily="34" charset="-120"/>
+            </a:endParaRPr>
+          </a:p>
+        </p:txBody>
+      </p:sp>
+    </p:spTree>
+    <p:extLst>
+      <p:ext uri="{BB962C8B-B14F-4D97-AF65-F5344CB8AC3E}">
+        <p14:creationId xmlns:p14="http://schemas.microsoft.com/office/powerpoint/2010/main" val="787013881"/>
+      </p:ext>
+    </p:extLst>
+  </p:cSld>
+  <p:clrMapOvr>
+    <a:masterClrMapping/>
+  </p:clrMapOvr>
 </p:sld>
 </file>
 
